--- a/docs/교재/통합반_오프라인/03회차/통합반_오프라인_03회차.pptx
+++ b/docs/교재/통합반_오프라인/03회차/통합반_오프라인_03회차.pptx
@@ -6414,7 +6414,7 @@
       </p:sp>
       <p:pic>
         <p:nvPicPr>
-          <p:cNvPr id="6" name="삽화:운전모드_0.svg" descr="illust_5964880015266790373_1791717219.png"/>
+          <p:cNvPr id="6" name="삽화:운전모드_0.svg" descr="illust_8709313872351926819_1791717219.png"/>
           <p:cNvPicPr>
             <a:picLocks noChangeAspect="1"/>
           </p:cNvPicPr>
@@ -6988,7 +6988,7 @@
       </p:sp>
       <p:pic>
         <p:nvPicPr>
-          <p:cNvPr id="6" name="삽화:운전모드_3.svg" descr="illust_1909482881797329360_1791717219.png"/>
+          <p:cNvPr id="6" name="삽화:운전모드_3.svg" descr="illust_8313090746090770312_1791717219.png"/>
           <p:cNvPicPr>
             <a:picLocks noChangeAspect="1"/>
           </p:cNvPicPr>
@@ -11022,7 +11022,7 @@
       </p:sp>
       <p:pic>
         <p:nvPicPr>
-          <p:cNvPr id="6" name="삽화:결정표_6.svg" descr="illust_3655392667124696198_1791717219.png"/>
+          <p:cNvPr id="6" name="삽화:결정표_6.svg" descr="illust_468601982022022398_1791717219.png"/>
           <p:cNvPicPr>
             <a:picLocks noChangeAspect="1"/>
           </p:cNvPicPr>
@@ -11953,7 +11953,7 @@
       </p:sp>
       <p:pic>
         <p:nvPicPr>
-          <p:cNvPr id="6" name="삽화:수직선_gt.svg" descr="illust_7322390969773032062_1791717219.png"/>
+          <p:cNvPr id="6" name="삽화:수직선_gt.svg" descr="illust_2961615639645136474_1791717219.png"/>
           <p:cNvPicPr>
             <a:picLocks noChangeAspect="1"/>
           </p:cNvPicPr>
@@ -18226,8 +18226,8 @@
         </p:nvSpPr>
         <p:spPr>
           <a:xfrm>
-            <a:off x="548640" y="1978215"/>
-            <a:ext cx="5181447" cy="4026281"/>
+            <a:off x="548640" y="2128647"/>
+            <a:ext cx="5181447" cy="3725418"/>
           </a:xfrm>
           <a:prstGeom prst="roundRect">
             <a:avLst>
@@ -18257,7 +18257,7 @@
         </p:nvSpPr>
         <p:spPr>
           <a:xfrm>
-            <a:off x="822959" y="2179383"/>
+            <a:off x="822959" y="2329815"/>
             <a:ext cx="731520" cy="731520"/>
           </a:xfrm>
           <a:prstGeom prst="ellipse">
@@ -18294,7 +18294,7 @@
         </p:blipFill>
         <p:spPr>
           <a:xfrm>
-            <a:off x="976579" y="2333002"/>
+            <a:off x="976579" y="2483434"/>
             <a:ext cx="424281" cy="424281"/>
           </a:xfrm>
           <a:prstGeom prst="rect">
@@ -18310,7 +18310,7 @@
         </p:nvSpPr>
         <p:spPr>
           <a:xfrm>
-            <a:off x="1691640" y="2179383"/>
+            <a:off x="1691640" y="2329815"/>
             <a:ext cx="3855567" cy="731520"/>
           </a:xfrm>
           <a:prstGeom prst="rect">
@@ -18349,8 +18349,8 @@
         </p:nvSpPr>
         <p:spPr>
           <a:xfrm>
-            <a:off x="822959" y="3029775"/>
-            <a:ext cx="4632807" cy="2426081"/>
+            <a:off x="822959" y="3180207"/>
+            <a:ext cx="4632807" cy="2125218"/>
           </a:xfrm>
           <a:prstGeom prst="rect">
             <a:avLst/>
@@ -18433,7 +18433,7 @@
         </p:nvSpPr>
         <p:spPr>
           <a:xfrm>
-            <a:off x="868680" y="5547296"/>
+            <a:off x="868680" y="5396865"/>
             <a:ext cx="1325879" cy="292608"/>
           </a:xfrm>
           <a:prstGeom prst="roundRect">
@@ -18464,7 +18464,7 @@
         </p:nvSpPr>
         <p:spPr>
           <a:xfrm>
-            <a:off x="868680" y="5547296"/>
+            <a:off x="868680" y="5396865"/>
             <a:ext cx="1325879" cy="292608"/>
           </a:xfrm>
           <a:prstGeom prst="rect">
@@ -18503,8 +18503,8 @@
         </p:nvSpPr>
         <p:spPr>
           <a:xfrm>
-            <a:off x="6461607" y="1978215"/>
-            <a:ext cx="5181447" cy="4026281"/>
+            <a:off x="6461607" y="2128647"/>
+            <a:ext cx="5181447" cy="3725418"/>
           </a:xfrm>
           <a:prstGeom prst="roundRect">
             <a:avLst>
@@ -18536,7 +18536,7 @@
         </p:nvSpPr>
         <p:spPr>
           <a:xfrm>
-            <a:off x="6735927" y="2179383"/>
+            <a:off x="6735927" y="2329815"/>
             <a:ext cx="731520" cy="731520"/>
           </a:xfrm>
           <a:prstGeom prst="ellipse">
@@ -18573,7 +18573,7 @@
         </p:blipFill>
         <p:spPr>
           <a:xfrm>
-            <a:off x="6889546" y="2333002"/>
+            <a:off x="6889546" y="2483434"/>
             <a:ext cx="424281" cy="424281"/>
           </a:xfrm>
           <a:prstGeom prst="rect">
@@ -18589,7 +18589,7 @@
         </p:nvSpPr>
         <p:spPr>
           <a:xfrm>
-            <a:off x="7604607" y="2179383"/>
+            <a:off x="7604607" y="2329815"/>
             <a:ext cx="3855567" cy="731520"/>
           </a:xfrm>
           <a:prstGeom prst="rect">
@@ -18615,7 +18615,7 @@
                 <a:ea typeface="맑은 고딕"/>
                 <a:cs typeface="맑은 고딕"/>
               </a:rPr>
-              <a:t>KPI (Key Performance Indicator)</a:t>
+              <a:t>KPI (핵심 성과 지표)</a:t>
             </a:r>
           </a:p>
         </p:txBody>
@@ -18628,8 +18628,8 @@
         </p:nvSpPr>
         <p:spPr>
           <a:xfrm>
-            <a:off x="6735927" y="3029775"/>
-            <a:ext cx="4632807" cy="2426081"/>
+            <a:off x="6735927" y="3180207"/>
+            <a:ext cx="4632807" cy="2125218"/>
           </a:xfrm>
           <a:prstGeom prst="rect">
             <a:avLst/>
@@ -18657,7 +18657,7 @@
                 <a:ea typeface="맑은 고딕"/>
                 <a:cs typeface="맑은 고딕"/>
               </a:rPr>
-              <a:t>• 목표를 얼마나 이루었는지를 수치로 재는 핵심 성과 지표이다</a:t>
+              <a:t>• 목표를 얼마나 이루었는지를 수치로 재는 지표이다</a:t>
             </a:r>
           </a:p>
           <a:p>
@@ -18733,7 +18733,7 @@
         </p:nvSpPr>
         <p:spPr>
           <a:xfrm>
-            <a:off x="6781647" y="5547296"/>
+            <a:off x="6781647" y="5396865"/>
             <a:ext cx="1021080" cy="292608"/>
           </a:xfrm>
           <a:prstGeom prst="roundRect">
@@ -18764,7 +18764,7 @@
         </p:nvSpPr>
         <p:spPr>
           <a:xfrm>
-            <a:off x="6781647" y="5547296"/>
+            <a:off x="6781647" y="5396865"/>
             <a:ext cx="1021080" cy="292608"/>
           </a:xfrm>
           <a:prstGeom prst="rect">
@@ -19037,7 +19037,7 @@
       </p:sp>
       <p:pic>
         <p:nvPicPr>
-          <p:cNvPr id="6" name="삽화:성과경로_5.svg" descr="illust_2914851387233603620_1791717219.png"/>
+          <p:cNvPr id="6" name="삽화:성과경로_5.svg" descr="illust_5078406393861986514_1791717219.png"/>
           <p:cNvPicPr>
             <a:picLocks noChangeAspect="1"/>
           </p:cNvPicPr>
@@ -20575,7 +20575,7 @@
       </p:sp>
       <p:pic>
         <p:nvPicPr>
-          <p:cNvPr id="6" name="삽화:가정분석_2.svg" descr="illust_2153697346782364126_1791717219.png"/>
+          <p:cNvPr id="6" name="삽화:가정분석_2.svg" descr="illust_6309887532080882582_1791717219.png"/>
           <p:cNvPicPr>
             <a:picLocks noChangeAspect="1"/>
           </p:cNvPicPr>
@@ -33069,7 +33069,7 @@
       </p:sp>
       <p:pic>
         <p:nvPicPr>
-          <p:cNvPr id="6" name="삽화:조치후보_전체.svg" descr="illust_6760446541756175927_1791717219.png"/>
+          <p:cNvPr id="6" name="삽화:조치후보_전체.svg" descr="illust_7207187445084844442_1791717219.png"/>
           <p:cNvPicPr>
             <a:picLocks noChangeAspect="1"/>
           </p:cNvPicPr>

--- a/docs/교재/통합반_오프라인/03회차/통합반_오프라인_03회차.pptx
+++ b/docs/교재/통합반_오프라인/03회차/통합반_오프라인_03회차.pptx
@@ -6485,7 +6485,7 @@
       </p:sp>
       <p:pic>
         <p:nvPicPr>
-          <p:cNvPr id="6" name="삽화:운전모드_0.svg" descr="illust_6667843421138039723_1791769661.png"/>
+          <p:cNvPr id="6" name="삽화:운전모드_0.svg" descr="illust_3717453092060871500_1791769661.png"/>
           <p:cNvPicPr>
             <a:picLocks noChangeAspect="1"/>
           </p:cNvPicPr>
@@ -7059,7 +7059,7 @@
       </p:sp>
       <p:pic>
         <p:nvPicPr>
-          <p:cNvPr id="6" name="삽화:운전모드_3.svg" descr="illust_6837443336831787921_1791769661.png"/>
+          <p:cNvPr id="6" name="삽화:운전모드_3.svg" descr="illust_8758557074413885628_1791769661.png"/>
           <p:cNvPicPr>
             <a:picLocks noChangeAspect="1"/>
           </p:cNvPicPr>
@@ -11093,7 +11093,7 @@
       </p:sp>
       <p:pic>
         <p:nvPicPr>
-          <p:cNvPr id="6" name="삽화:결정표_6.svg" descr="illust_5437465873373982445_1791769661.png"/>
+          <p:cNvPr id="6" name="삽화:결정표_6.svg" descr="illust_2195342429220481932_1791769661.png"/>
           <p:cNvPicPr>
             <a:picLocks noChangeAspect="1"/>
           </p:cNvPicPr>
@@ -12024,7 +12024,7 @@
       </p:sp>
       <p:pic>
         <p:nvPicPr>
-          <p:cNvPr id="6" name="삽화:수직선_gt.svg" descr="illust_6041856551662775016_1791769661.png"/>
+          <p:cNvPr id="6" name="삽화:수직선_gt.svg" descr="illust_3422618141067670368_1791769661.png"/>
           <p:cNvPicPr>
             <a:picLocks noChangeAspect="1"/>
           </p:cNvPicPr>
@@ -19129,7 +19129,7 @@
       </p:sp>
       <p:pic>
         <p:nvPicPr>
-          <p:cNvPr id="6" name="삽화:성과경로_5.svg" descr="illust_7876647275090477267_1791769661.png"/>
+          <p:cNvPr id="6" name="삽화:성과경로_5.svg" descr="illust_1263897272202267430_1791769661.png"/>
           <p:cNvPicPr>
             <a:picLocks noChangeAspect="1"/>
           </p:cNvPicPr>
@@ -21526,7 +21526,7 @@
       </p:sp>
       <p:pic>
         <p:nvPicPr>
-          <p:cNvPr id="6" name="삽화:가정분석_2.svg" descr="illust_184610648161854577_1791769661.png"/>
+          <p:cNvPr id="6" name="삽화:가정분석_2.svg" descr="illust_4636568882625467651_1791769661.png"/>
           <p:cNvPicPr>
             <a:picLocks noChangeAspect="1"/>
           </p:cNvPicPr>
@@ -30414,7 +30414,7 @@
                 <a:ea typeface="맑은 고딕"/>
                 <a:cs typeface="맑은 고딕"/>
               </a:rPr>
-              <a:t>배운 내용을 바탕으로 정답을 맞춰보세요.</a:t>
+              <a:t>배운 내용을 바탕으로 정답을 맞혀 보세요.</a:t>
             </a:r>
           </a:p>
         </p:txBody>
@@ -34020,7 +34020,7 @@
       </p:sp>
       <p:pic>
         <p:nvPicPr>
-          <p:cNvPr id="6" name="삽화:조치후보_전체.svg" descr="illust_5409538033441920622_1791769661.png"/>
+          <p:cNvPr id="6" name="삽화:조치후보_전체.svg" descr="illust_6077119942175559207_1791769661.png"/>
           <p:cNvPicPr>
             <a:picLocks noChangeAspect="1"/>
           </p:cNvPicPr>

--- a/docs/교재/통합반_오프라인/03회차/통합반_오프라인_03회차.pptx
+++ b/docs/교재/통합반_오프라인/03회차/통합반_오프라인_03회차.pptx
@@ -6485,7 +6485,7 @@
       </p:sp>
       <p:pic>
         <p:nvPicPr>
-          <p:cNvPr id="6" name="삽화:운전모드_0.svg" descr="illust_3717453092060871500_1791769661.png"/>
+          <p:cNvPr id="6" name="삽화:운전모드_0.svg" descr="illust_3216355892369527830_1791769661.png"/>
           <p:cNvPicPr>
             <a:picLocks noChangeAspect="1"/>
           </p:cNvPicPr>
@@ -7059,7 +7059,7 @@
       </p:sp>
       <p:pic>
         <p:nvPicPr>
-          <p:cNvPr id="6" name="삽화:운전모드_3.svg" descr="illust_8758557074413885628_1791769661.png"/>
+          <p:cNvPr id="6" name="삽화:운전모드_3.svg" descr="illust_7148047831933485709_1791769661.png"/>
           <p:cNvPicPr>
             <a:picLocks noChangeAspect="1"/>
           </p:cNvPicPr>
@@ -11093,7 +11093,7 @@
       </p:sp>
       <p:pic>
         <p:nvPicPr>
-          <p:cNvPr id="6" name="삽화:결정표_6.svg" descr="illust_2195342429220481932_1791769661.png"/>
+          <p:cNvPr id="6" name="삽화:결정표_6.svg" descr="illust_6004800100081820425_1791769661.png"/>
           <p:cNvPicPr>
             <a:picLocks noChangeAspect="1"/>
           </p:cNvPicPr>
@@ -12024,7 +12024,7 @@
       </p:sp>
       <p:pic>
         <p:nvPicPr>
-          <p:cNvPr id="6" name="삽화:수직선_gt.svg" descr="illust_3422618141067670368_1791769661.png"/>
+          <p:cNvPr id="6" name="삽화:수직선_gt.svg" descr="illust_5046980395072777237_1791769661.png"/>
           <p:cNvPicPr>
             <a:picLocks noChangeAspect="1"/>
           </p:cNvPicPr>
@@ -19129,7 +19129,7 @@
       </p:sp>
       <p:pic>
         <p:nvPicPr>
-          <p:cNvPr id="6" name="삽화:성과경로_5.svg" descr="illust_1263897272202267430_1791769661.png"/>
+          <p:cNvPr id="6" name="삽화:성과경로_5.svg" descr="illust_8092216150369456507_1791769661.png"/>
           <p:cNvPicPr>
             <a:picLocks noChangeAspect="1"/>
           </p:cNvPicPr>
@@ -21526,7 +21526,7 @@
       </p:sp>
       <p:pic>
         <p:nvPicPr>
-          <p:cNvPr id="6" name="삽화:가정분석_2.svg" descr="illust_4636568882625467651_1791769661.png"/>
+          <p:cNvPr id="6" name="삽화:가정분석_2.svg" descr="illust_5902726987017271075_1791769661.png"/>
           <p:cNvPicPr>
             <a:picLocks noChangeAspect="1"/>
           </p:cNvPicPr>
@@ -34020,7 +34020,7 @@
       </p:sp>
       <p:pic>
         <p:nvPicPr>
-          <p:cNvPr id="6" name="삽화:조치후보_전체.svg" descr="illust_6077119942175559207_1791769661.png"/>
+          <p:cNvPr id="6" name="삽화:조치후보_전체.svg" descr="illust_6241343862112133124_1791769661.png"/>
           <p:cNvPicPr>
             <a:picLocks noChangeAspect="1"/>
           </p:cNvPicPr>
